--- a/보장설명서_김규훈님_편집가능.pptx
+++ b/보장설명서_김규훈님_편집가능.pptx
@@ -5299,7 +5299,7 @@
                 <a:ea typeface="맑은 고딕"/>
                 <a:cs typeface="맑은 고딕"/>
               </a:rPr>
-              <a:t>고액암 4,000만   일반암 2,200만   유사암 410만</a:t>
+              <a:t>고액암 4,000만   일반암 2,100만   유사암 410만</a:t>
             </a:r>
           </a:p>
         </p:txBody>
@@ -6113,7 +6113,7 @@
                 <a:ea typeface="맑은 고딕"/>
                 <a:cs typeface="맑은 고딕"/>
               </a:rPr>
-              <a:t>상해중환자실 5만   간호통합병동 10만</a:t>
+              <a:t>상해중환자실 5만   간호통합병동 5만</a:t>
             </a:r>
           </a:p>
         </p:txBody>
@@ -6273,7 +6273,7 @@
                 <a:ea typeface="맑은 고딕"/>
                 <a:cs typeface="맑은 고딕"/>
               </a:rPr>
-              <a:t>일상배상책임 1억   입원 5,000만   통원 20만</a:t>
+              <a:t>일상배상책임 1억</a:t>
             </a:r>
           </a:p>
         </p:txBody>
@@ -9177,7 +9177,7 @@
       </p:sp>
       <p:pic>
         <p:nvPicPr>
-          <p:cNvPr id="8" name="Picture 7" descr="g66_9079.png"/>
+          <p:cNvPr id="8" name="Picture 7" descr="g65_523.png"/>
           <p:cNvPicPr>
             <a:picLocks noChangeAspect="1"/>
           </p:cNvPicPr>
@@ -9231,7 +9231,7 @@
                 <a:ea typeface="맑은 고딕"/>
                 <a:cs typeface="맑은 고딕"/>
               </a:rPr>
-              <a:t>66%</a:t>
+              <a:t>65%</a:t>
             </a:r>
           </a:p>
         </p:txBody>
@@ -9275,7 +9275,7 @@
       </p:sp>
       <p:pic>
         <p:nvPicPr>
-          <p:cNvPr id="11" name="Picture 10" descr="g100_4056.png"/>
+          <p:cNvPr id="11" name="Picture 10" descr="g100_4464.png"/>
           <p:cNvPicPr>
             <a:picLocks noChangeAspect="1"/>
           </p:cNvPicPr>
@@ -9373,7 +9373,399 @@
       </p:sp>
       <p:pic>
         <p:nvPicPr>
-          <p:cNvPr id="14" name="Picture 13" descr="g100_4056.png"/>
+          <p:cNvPr id="14" name="Picture 13" descr="g33_3356.png"/>
+          <p:cNvPicPr>
+            <a:picLocks noChangeAspect="1"/>
+          </p:cNvPicPr>
+          <p:nvPr/>
+        </p:nvPicPr>
+        <p:blipFill>
+          <a:blip r:embed="rId4"/>
+          <a:stretch>
+            <a:fillRect/>
+          </a:stretch>
+        </p:blipFill>
+        <p:spPr>
+          <a:xfrm>
+            <a:off x="5372099" y="1440180"/>
+            <a:ext cx="1051560" cy="1051560"/>
+          </a:xfrm>
+          <a:prstGeom prst="rect">
+            <a:avLst/>
+          </a:prstGeom>
+        </p:spPr>
+      </p:pic>
+      <p:sp>
+        <p:nvSpPr>
+          <p:cNvPr id="15" name="TextBox 14"/>
+          <p:cNvSpPr txBox="1"/>
+          <p:nvPr/>
+        </p:nvSpPr>
+        <p:spPr>
+          <a:xfrm>
+            <a:off x="5372099" y="1819656"/>
+            <a:ext cx="1051560" cy="292608"/>
+          </a:xfrm>
+          <a:prstGeom prst="rect">
+            <a:avLst/>
+          </a:prstGeom>
+          <a:noFill/>
+        </p:spPr>
+        <p:txBody>
+          <a:bodyPr wrap="none" anchor="t" lIns="45720" rIns="45720" tIns="22860" bIns="22860">
+            <a:spAutoFit/>
+          </a:bodyPr>
+          <a:lstStyle/>
+          <a:p>
+            <a:pPr algn="ctr"/>
+            <a:r>
+              <a:rPr sz="1300" b="1">
+                <a:solidFill>
+                  <a:srgbClr val="1A1A1A"/>
+                </a:solidFill>
+                <a:latin typeface="맑은 고딕"/>
+                <a:ea typeface="맑은 고딕"/>
+                <a:cs typeface="맑은 고딕"/>
+              </a:rPr>
+              <a:t>33%</a:t>
+            </a:r>
+          </a:p>
+        </p:txBody>
+      </p:sp>
+      <p:sp>
+        <p:nvSpPr>
+          <p:cNvPr id="16" name="TextBox 15"/>
+          <p:cNvSpPr txBox="1"/>
+          <p:nvPr/>
+        </p:nvSpPr>
+        <p:spPr>
+          <a:xfrm>
+            <a:off x="5074919" y="2528316"/>
+            <a:ext cx="1645920" cy="256032"/>
+          </a:xfrm>
+          <a:prstGeom prst="rect">
+            <a:avLst/>
+          </a:prstGeom>
+          <a:noFill/>
+        </p:spPr>
+        <p:txBody>
+          <a:bodyPr wrap="none" anchor="t" lIns="45720" rIns="45720" tIns="22860" bIns="22860">
+            <a:spAutoFit/>
+          </a:bodyPr>
+          <a:lstStyle/>
+          <a:p>
+            <a:pPr algn="ctr"/>
+            <a:r>
+              <a:rPr sz="900" b="1">
+                <a:solidFill>
+                  <a:srgbClr val="1A1A1A"/>
+                </a:solidFill>
+                <a:latin typeface="맑은 고딕"/>
+                <a:ea typeface="맑은 고딕"/>
+                <a:cs typeface="맑은 고딕"/>
+              </a:rPr>
+              <a:t>실손·배상</a:t>
+            </a:r>
+          </a:p>
+        </p:txBody>
+      </p:sp>
+      <p:pic>
+        <p:nvPicPr>
+          <p:cNvPr id="17" name="Picture 16" descr="g25_2625.png"/>
+          <p:cNvPicPr>
+            <a:picLocks noChangeAspect="1"/>
+          </p:cNvPicPr>
+          <p:nvPr/>
+        </p:nvPicPr>
+        <p:blipFill>
+          <a:blip r:embed="rId5"/>
+          <a:stretch>
+            <a:fillRect/>
+          </a:stretch>
+        </p:blipFill>
+        <p:spPr>
+          <a:xfrm>
+            <a:off x="7703820" y="1440180"/>
+            <a:ext cx="1051560" cy="1051560"/>
+          </a:xfrm>
+          <a:prstGeom prst="rect">
+            <a:avLst/>
+          </a:prstGeom>
+        </p:spPr>
+      </p:pic>
+      <p:sp>
+        <p:nvSpPr>
+          <p:cNvPr id="18" name="TextBox 17"/>
+          <p:cNvSpPr txBox="1"/>
+          <p:nvPr/>
+        </p:nvSpPr>
+        <p:spPr>
+          <a:xfrm>
+            <a:off x="7703820" y="1819656"/>
+            <a:ext cx="1051560" cy="292608"/>
+          </a:xfrm>
+          <a:prstGeom prst="rect">
+            <a:avLst/>
+          </a:prstGeom>
+          <a:noFill/>
+        </p:spPr>
+        <p:txBody>
+          <a:bodyPr wrap="none" anchor="t" lIns="45720" rIns="45720" tIns="22860" bIns="22860">
+            <a:spAutoFit/>
+          </a:bodyPr>
+          <a:lstStyle/>
+          <a:p>
+            <a:pPr algn="ctr"/>
+            <a:r>
+              <a:rPr sz="1300" b="1">
+                <a:solidFill>
+                  <a:srgbClr val="1A1A1A"/>
+                </a:solidFill>
+                <a:latin typeface="맑은 고딕"/>
+                <a:ea typeface="맑은 고딕"/>
+                <a:cs typeface="맑은 고딕"/>
+              </a:rPr>
+              <a:t>25%</a:t>
+            </a:r>
+          </a:p>
+        </p:txBody>
+      </p:sp>
+      <p:sp>
+        <p:nvSpPr>
+          <p:cNvPr id="19" name="TextBox 18"/>
+          <p:cNvSpPr txBox="1"/>
+          <p:nvPr/>
+        </p:nvSpPr>
+        <p:spPr>
+          <a:xfrm>
+            <a:off x="7406640" y="2528316"/>
+            <a:ext cx="1645920" cy="256032"/>
+          </a:xfrm>
+          <a:prstGeom prst="rect">
+            <a:avLst/>
+          </a:prstGeom>
+          <a:noFill/>
+        </p:spPr>
+        <p:txBody>
+          <a:bodyPr wrap="none" anchor="t" lIns="45720" rIns="45720" tIns="22860" bIns="22860">
+            <a:spAutoFit/>
+          </a:bodyPr>
+          <a:lstStyle/>
+          <a:p>
+            <a:pPr algn="ctr"/>
+            <a:r>
+              <a:rPr sz="900" b="1">
+                <a:solidFill>
+                  <a:srgbClr val="1A1A1A"/>
+                </a:solidFill>
+                <a:latin typeface="맑은 고딕"/>
+                <a:ea typeface="맑은 고딕"/>
+                <a:cs typeface="맑은 고딕"/>
+              </a:rPr>
+              <a:t>수술비</a:t>
+            </a:r>
+          </a:p>
+        </p:txBody>
+      </p:sp>
+      <p:pic>
+        <p:nvPicPr>
+          <p:cNvPr id="20" name="Picture 19" descr="g0_4121.png"/>
+          <p:cNvPicPr>
+            <a:picLocks noChangeAspect="1"/>
+          </p:cNvPicPr>
+          <p:nvPr/>
+        </p:nvPicPr>
+        <p:blipFill>
+          <a:blip r:embed="rId6"/>
+          <a:stretch>
+            <a:fillRect/>
+          </a:stretch>
+        </p:blipFill>
+        <p:spPr>
+          <a:xfrm>
+            <a:off x="10035539" y="1440180"/>
+            <a:ext cx="1051560" cy="1051560"/>
+          </a:xfrm>
+          <a:prstGeom prst="rect">
+            <a:avLst/>
+          </a:prstGeom>
+        </p:spPr>
+      </p:pic>
+      <p:sp>
+        <p:nvSpPr>
+          <p:cNvPr id="21" name="TextBox 20"/>
+          <p:cNvSpPr txBox="1"/>
+          <p:nvPr/>
+        </p:nvSpPr>
+        <p:spPr>
+          <a:xfrm>
+            <a:off x="10035539" y="1819656"/>
+            <a:ext cx="1051560" cy="292608"/>
+          </a:xfrm>
+          <a:prstGeom prst="rect">
+            <a:avLst/>
+          </a:prstGeom>
+          <a:noFill/>
+        </p:spPr>
+        <p:txBody>
+          <a:bodyPr wrap="none" anchor="t" lIns="45720" rIns="45720" tIns="22860" bIns="22860">
+            <a:spAutoFit/>
+          </a:bodyPr>
+          <a:lstStyle/>
+          <a:p>
+            <a:pPr algn="ctr"/>
+            <a:r>
+              <a:rPr sz="1300" b="1">
+                <a:solidFill>
+                  <a:srgbClr val="1A1A1A"/>
+                </a:solidFill>
+                <a:latin typeface="맑은 고딕"/>
+                <a:ea typeface="맑은 고딕"/>
+                <a:cs typeface="맑은 고딕"/>
+              </a:rPr>
+              <a:t>0%</a:t>
+            </a:r>
+          </a:p>
+        </p:txBody>
+      </p:sp>
+      <p:sp>
+        <p:nvSpPr>
+          <p:cNvPr id="22" name="TextBox 21"/>
+          <p:cNvSpPr txBox="1"/>
+          <p:nvPr/>
+        </p:nvSpPr>
+        <p:spPr>
+          <a:xfrm>
+            <a:off x="9738359" y="2528316"/>
+            <a:ext cx="1645920" cy="256032"/>
+          </a:xfrm>
+          <a:prstGeom prst="rect">
+            <a:avLst/>
+          </a:prstGeom>
+          <a:noFill/>
+        </p:spPr>
+        <p:txBody>
+          <a:bodyPr wrap="none" anchor="t" lIns="45720" rIns="45720" tIns="22860" bIns="22860">
+            <a:spAutoFit/>
+          </a:bodyPr>
+          <a:lstStyle/>
+          <a:p>
+            <a:pPr algn="ctr"/>
+            <a:r>
+              <a:rPr sz="900" b="1">
+                <a:solidFill>
+                  <a:srgbClr val="1A1A1A"/>
+                </a:solidFill>
+                <a:latin typeface="맑은 고딕"/>
+                <a:ea typeface="맑은 고딕"/>
+                <a:cs typeface="맑은 고딕"/>
+              </a:rPr>
+              <a:t>뇌혈관</a:t>
+            </a:r>
+          </a:p>
+        </p:txBody>
+      </p:sp>
+      <p:pic>
+        <p:nvPicPr>
+          <p:cNvPr id="23" name="Picture 22" descr="g34_61.png"/>
+          <p:cNvPicPr>
+            <a:picLocks noChangeAspect="1"/>
+          </p:cNvPicPr>
+          <p:nvPr/>
+        </p:nvPicPr>
+        <p:blipFill>
+          <a:blip r:embed="rId7"/>
+          <a:stretch>
+            <a:fillRect/>
+          </a:stretch>
+        </p:blipFill>
+        <p:spPr>
+          <a:xfrm>
+            <a:off x="708660" y="3131820"/>
+            <a:ext cx="1051560" cy="1051560"/>
+          </a:xfrm>
+          <a:prstGeom prst="rect">
+            <a:avLst/>
+          </a:prstGeom>
+        </p:spPr>
+      </p:pic>
+      <p:sp>
+        <p:nvSpPr>
+          <p:cNvPr id="24" name="TextBox 23"/>
+          <p:cNvSpPr txBox="1"/>
+          <p:nvPr/>
+        </p:nvSpPr>
+        <p:spPr>
+          <a:xfrm>
+            <a:off x="708660" y="3511296"/>
+            <a:ext cx="1051560" cy="292608"/>
+          </a:xfrm>
+          <a:prstGeom prst="rect">
+            <a:avLst/>
+          </a:prstGeom>
+          <a:noFill/>
+        </p:spPr>
+        <p:txBody>
+          <a:bodyPr wrap="none" anchor="t" lIns="45720" rIns="45720" tIns="22860" bIns="22860">
+            <a:spAutoFit/>
+          </a:bodyPr>
+          <a:lstStyle/>
+          <a:p>
+            <a:pPr algn="ctr"/>
+            <a:r>
+              <a:rPr sz="1300" b="1">
+                <a:solidFill>
+                  <a:srgbClr val="1A1A1A"/>
+                </a:solidFill>
+                <a:latin typeface="맑은 고딕"/>
+                <a:ea typeface="맑은 고딕"/>
+                <a:cs typeface="맑은 고딕"/>
+              </a:rPr>
+              <a:t>34%</a:t>
+            </a:r>
+          </a:p>
+        </p:txBody>
+      </p:sp>
+      <p:sp>
+        <p:nvSpPr>
+          <p:cNvPr id="25" name="TextBox 24"/>
+          <p:cNvSpPr txBox="1"/>
+          <p:nvPr/>
+        </p:nvSpPr>
+        <p:spPr>
+          <a:xfrm>
+            <a:off x="411480" y="4219956"/>
+            <a:ext cx="1645920" cy="256032"/>
+          </a:xfrm>
+          <a:prstGeom prst="rect">
+            <a:avLst/>
+          </a:prstGeom>
+          <a:noFill/>
+        </p:spPr>
+        <p:txBody>
+          <a:bodyPr wrap="none" anchor="t" lIns="45720" rIns="45720" tIns="22860" bIns="22860">
+            <a:spAutoFit/>
+          </a:bodyPr>
+          <a:lstStyle/>
+          <a:p>
+            <a:pPr algn="ctr"/>
+            <a:r>
+              <a:rPr sz="900" b="1">
+                <a:solidFill>
+                  <a:srgbClr val="1A1A1A"/>
+                </a:solidFill>
+                <a:latin typeface="맑은 고딕"/>
+                <a:ea typeface="맑은 고딕"/>
+                <a:cs typeface="맑은 고딕"/>
+              </a:rPr>
+              <a:t>사망·후유</a:t>
+            </a:r>
+          </a:p>
+        </p:txBody>
+      </p:sp>
+      <p:pic>
+        <p:nvPicPr>
+          <p:cNvPr id="26" name="Picture 25" descr="g100_4464.png"/>
           <p:cNvPicPr>
             <a:picLocks noChangeAspect="1"/>
           </p:cNvPicPr>
@@ -9387,7 +9779,7 @@
         </p:blipFill>
         <p:spPr>
           <a:xfrm>
-            <a:off x="5372099" y="1440180"/>
+            <a:off x="3040380" y="3131820"/>
             <a:ext cx="1051560" cy="1051560"/>
           </a:xfrm>
           <a:prstGeom prst="rect">
@@ -9397,13 +9789,13 @@
       </p:pic>
       <p:sp>
         <p:nvSpPr>
-          <p:cNvPr id="15" name="TextBox 14"/>
-          <p:cNvSpPr txBox="1"/>
-          <p:nvPr/>
-        </p:nvSpPr>
-        <p:spPr>
-          <a:xfrm>
-            <a:off x="5372099" y="1819656"/>
+          <p:cNvPr id="27" name="TextBox 26"/>
+          <p:cNvSpPr txBox="1"/>
+          <p:nvPr/>
+        </p:nvSpPr>
+        <p:spPr>
+          <a:xfrm>
+            <a:off x="3040380" y="3511296"/>
             <a:ext cx="1051560" cy="292608"/>
           </a:xfrm>
           <a:prstGeom prst="rect">
@@ -9434,13 +9826,13 @@
       </p:sp>
       <p:sp>
         <p:nvSpPr>
-          <p:cNvPr id="16" name="TextBox 15"/>
-          <p:cNvSpPr txBox="1"/>
-          <p:nvPr/>
-        </p:nvSpPr>
-        <p:spPr>
-          <a:xfrm>
-            <a:off x="5074919" y="2528316"/>
+          <p:cNvPr id="28" name="TextBox 27"/>
+          <p:cNvSpPr txBox="1"/>
+          <p:nvPr/>
+        </p:nvSpPr>
+        <p:spPr>
+          <a:xfrm>
+            <a:off x="2743200" y="4219956"/>
             <a:ext cx="1645920" cy="256032"/>
           </a:xfrm>
           <a:prstGeom prst="rect">
@@ -9464,210 +9856,14 @@
                 <a:ea typeface="맑은 고딕"/>
                 <a:cs typeface="맑은 고딕"/>
               </a:rPr>
-              <a:t>실손·배상</a:t>
+              <a:t>골절·화상</a:t>
             </a:r>
           </a:p>
         </p:txBody>
       </p:sp>
       <p:pic>
         <p:nvPicPr>
-          <p:cNvPr id="17" name="Picture 16" descr="g25_1966.png"/>
-          <p:cNvPicPr>
-            <a:picLocks noChangeAspect="1"/>
-          </p:cNvPicPr>
-          <p:nvPr/>
-        </p:nvPicPr>
-        <p:blipFill>
-          <a:blip r:embed="rId4"/>
-          <a:stretch>
-            <a:fillRect/>
-          </a:stretch>
-        </p:blipFill>
-        <p:spPr>
-          <a:xfrm>
-            <a:off x="7703820" y="1440180"/>
-            <a:ext cx="1051560" cy="1051560"/>
-          </a:xfrm>
-          <a:prstGeom prst="rect">
-            <a:avLst/>
-          </a:prstGeom>
-        </p:spPr>
-      </p:pic>
-      <p:sp>
-        <p:nvSpPr>
-          <p:cNvPr id="18" name="TextBox 17"/>
-          <p:cNvSpPr txBox="1"/>
-          <p:nvPr/>
-        </p:nvSpPr>
-        <p:spPr>
-          <a:xfrm>
-            <a:off x="7703820" y="1819656"/>
-            <a:ext cx="1051560" cy="292608"/>
-          </a:xfrm>
-          <a:prstGeom prst="rect">
-            <a:avLst/>
-          </a:prstGeom>
-          <a:noFill/>
-        </p:spPr>
-        <p:txBody>
-          <a:bodyPr wrap="none" anchor="t" lIns="45720" rIns="45720" tIns="22860" bIns="22860">
-            <a:spAutoFit/>
-          </a:bodyPr>
-          <a:lstStyle/>
-          <a:p>
-            <a:pPr algn="ctr"/>
-            <a:r>
-              <a:rPr sz="1300" b="1">
-                <a:solidFill>
-                  <a:srgbClr val="1A1A1A"/>
-                </a:solidFill>
-                <a:latin typeface="맑은 고딕"/>
-                <a:ea typeface="맑은 고딕"/>
-                <a:cs typeface="맑은 고딕"/>
-              </a:rPr>
-              <a:t>25%</a:t>
-            </a:r>
-          </a:p>
-        </p:txBody>
-      </p:sp>
-      <p:sp>
-        <p:nvSpPr>
-          <p:cNvPr id="19" name="TextBox 18"/>
-          <p:cNvSpPr txBox="1"/>
-          <p:nvPr/>
-        </p:nvSpPr>
-        <p:spPr>
-          <a:xfrm>
-            <a:off x="7406640" y="2528316"/>
-            <a:ext cx="1645920" cy="256032"/>
-          </a:xfrm>
-          <a:prstGeom prst="rect">
-            <a:avLst/>
-          </a:prstGeom>
-          <a:noFill/>
-        </p:spPr>
-        <p:txBody>
-          <a:bodyPr wrap="none" anchor="t" lIns="45720" rIns="45720" tIns="22860" bIns="22860">
-            <a:spAutoFit/>
-          </a:bodyPr>
-          <a:lstStyle/>
-          <a:p>
-            <a:pPr algn="ctr"/>
-            <a:r>
-              <a:rPr sz="900" b="1">
-                <a:solidFill>
-                  <a:srgbClr val="1A1A1A"/>
-                </a:solidFill>
-                <a:latin typeface="맑은 고딕"/>
-                <a:ea typeface="맑은 고딕"/>
-                <a:cs typeface="맑은 고딕"/>
-              </a:rPr>
-              <a:t>수술비</a:t>
-            </a:r>
-          </a:p>
-        </p:txBody>
-      </p:sp>
-      <p:pic>
-        <p:nvPicPr>
-          <p:cNvPr id="20" name="Picture 19" descr="g0_6502.png"/>
-          <p:cNvPicPr>
-            <a:picLocks noChangeAspect="1"/>
-          </p:cNvPicPr>
-          <p:nvPr/>
-        </p:nvPicPr>
-        <p:blipFill>
-          <a:blip r:embed="rId5"/>
-          <a:stretch>
-            <a:fillRect/>
-          </a:stretch>
-        </p:blipFill>
-        <p:spPr>
-          <a:xfrm>
-            <a:off x="10035539" y="1440180"/>
-            <a:ext cx="1051560" cy="1051560"/>
-          </a:xfrm>
-          <a:prstGeom prst="rect">
-            <a:avLst/>
-          </a:prstGeom>
-        </p:spPr>
-      </p:pic>
-      <p:sp>
-        <p:nvSpPr>
-          <p:cNvPr id="21" name="TextBox 20"/>
-          <p:cNvSpPr txBox="1"/>
-          <p:nvPr/>
-        </p:nvSpPr>
-        <p:spPr>
-          <a:xfrm>
-            <a:off x="10035539" y="1819656"/>
-            <a:ext cx="1051560" cy="292608"/>
-          </a:xfrm>
-          <a:prstGeom prst="rect">
-            <a:avLst/>
-          </a:prstGeom>
-          <a:noFill/>
-        </p:spPr>
-        <p:txBody>
-          <a:bodyPr wrap="none" anchor="t" lIns="45720" rIns="45720" tIns="22860" bIns="22860">
-            <a:spAutoFit/>
-          </a:bodyPr>
-          <a:lstStyle/>
-          <a:p>
-            <a:pPr algn="ctr"/>
-            <a:r>
-              <a:rPr sz="1300" b="1">
-                <a:solidFill>
-                  <a:srgbClr val="1A1A1A"/>
-                </a:solidFill>
-                <a:latin typeface="맑은 고딕"/>
-                <a:ea typeface="맑은 고딕"/>
-                <a:cs typeface="맑은 고딕"/>
-              </a:rPr>
-              <a:t>0%</a:t>
-            </a:r>
-          </a:p>
-        </p:txBody>
-      </p:sp>
-      <p:sp>
-        <p:nvSpPr>
-          <p:cNvPr id="22" name="TextBox 21"/>
-          <p:cNvSpPr txBox="1"/>
-          <p:nvPr/>
-        </p:nvSpPr>
-        <p:spPr>
-          <a:xfrm>
-            <a:off x="9738359" y="2528316"/>
-            <a:ext cx="1645920" cy="256032"/>
-          </a:xfrm>
-          <a:prstGeom prst="rect">
-            <a:avLst/>
-          </a:prstGeom>
-          <a:noFill/>
-        </p:spPr>
-        <p:txBody>
-          <a:bodyPr wrap="none" anchor="t" lIns="45720" rIns="45720" tIns="22860" bIns="22860">
-            <a:spAutoFit/>
-          </a:bodyPr>
-          <a:lstStyle/>
-          <a:p>
-            <a:pPr algn="ctr"/>
-            <a:r>
-              <a:rPr sz="900" b="1">
-                <a:solidFill>
-                  <a:srgbClr val="1A1A1A"/>
-                </a:solidFill>
-                <a:latin typeface="맑은 고딕"/>
-                <a:ea typeface="맑은 고딕"/>
-                <a:cs typeface="맑은 고딕"/>
-              </a:rPr>
-              <a:t>뇌혈관</a:t>
-            </a:r>
-          </a:p>
-        </p:txBody>
-      </p:sp>
-      <p:pic>
-        <p:nvPicPr>
-          <p:cNvPr id="23" name="Picture 22" descr="g34_5889.png"/>
+          <p:cNvPr id="29" name="Picture 28" descr="g0_4121.png"/>
           <p:cNvPicPr>
             <a:picLocks noChangeAspect="1"/>
           </p:cNvPicPr>
@@ -9681,7 +9877,7 @@
         </p:blipFill>
         <p:spPr>
           <a:xfrm>
-            <a:off x="708660" y="3131820"/>
+            <a:off x="5372099" y="3131820"/>
             <a:ext cx="1051560" cy="1051560"/>
           </a:xfrm>
           <a:prstGeom prst="rect">
@@ -9691,13 +9887,13 @@
       </p:pic>
       <p:sp>
         <p:nvSpPr>
-          <p:cNvPr id="24" name="TextBox 23"/>
-          <p:cNvSpPr txBox="1"/>
-          <p:nvPr/>
-        </p:nvSpPr>
-        <p:spPr>
-          <a:xfrm>
-            <a:off x="708660" y="3511296"/>
+          <p:cNvPr id="30" name="TextBox 29"/>
+          <p:cNvSpPr txBox="1"/>
+          <p:nvPr/>
+        </p:nvSpPr>
+        <p:spPr>
+          <a:xfrm>
+            <a:off x="5372099" y="3511296"/>
             <a:ext cx="1051560" cy="292608"/>
           </a:xfrm>
           <a:prstGeom prst="rect">
@@ -9721,20 +9917,20 @@
                 <a:ea typeface="맑은 고딕"/>
                 <a:cs typeface="맑은 고딕"/>
               </a:rPr>
-              <a:t>34%</a:t>
-            </a:r>
-          </a:p>
-        </p:txBody>
-      </p:sp>
-      <p:sp>
-        <p:nvSpPr>
-          <p:cNvPr id="25" name="TextBox 24"/>
-          <p:cNvSpPr txBox="1"/>
-          <p:nvPr/>
-        </p:nvSpPr>
-        <p:spPr>
-          <a:xfrm>
-            <a:off x="411480" y="4219956"/>
+              <a:t>0%</a:t>
+            </a:r>
+          </a:p>
+        </p:txBody>
+      </p:sp>
+      <p:sp>
+        <p:nvSpPr>
+          <p:cNvPr id="31" name="TextBox 30"/>
+          <p:cNvSpPr txBox="1"/>
+          <p:nvPr/>
+        </p:nvSpPr>
+        <p:spPr>
+          <a:xfrm>
+            <a:off x="5074919" y="4219956"/>
             <a:ext cx="1645920" cy="256032"/>
           </a:xfrm>
           <a:prstGeom prst="rect">
@@ -9758,14 +9954,14 @@
                 <a:ea typeface="맑은 고딕"/>
                 <a:cs typeface="맑은 고딕"/>
               </a:rPr>
-              <a:t>사망·후유</a:t>
+              <a:t>심장</a:t>
             </a:r>
           </a:p>
         </p:txBody>
       </p:sp>
       <p:pic>
         <p:nvPicPr>
-          <p:cNvPr id="26" name="Picture 25" descr="g100_4056.png"/>
+          <p:cNvPr id="32" name="Picture 31" descr="g100_4464.png"/>
           <p:cNvPicPr>
             <a:picLocks noChangeAspect="1"/>
           </p:cNvPicPr>
@@ -9779,7 +9975,7 @@
         </p:blipFill>
         <p:spPr>
           <a:xfrm>
-            <a:off x="3040380" y="3131820"/>
+            <a:off x="7703820" y="3131820"/>
             <a:ext cx="1051560" cy="1051560"/>
           </a:xfrm>
           <a:prstGeom prst="rect">
@@ -9789,13 +9985,13 @@
       </p:pic>
       <p:sp>
         <p:nvSpPr>
-          <p:cNvPr id="27" name="TextBox 26"/>
-          <p:cNvSpPr txBox="1"/>
-          <p:nvPr/>
-        </p:nvSpPr>
-        <p:spPr>
-          <a:xfrm>
-            <a:off x="3040380" y="3511296"/>
+          <p:cNvPr id="33" name="TextBox 32"/>
+          <p:cNvSpPr txBox="1"/>
+          <p:nvPr/>
+        </p:nvSpPr>
+        <p:spPr>
+          <a:xfrm>
+            <a:off x="7703820" y="3511296"/>
             <a:ext cx="1051560" cy="292608"/>
           </a:xfrm>
           <a:prstGeom prst="rect">
@@ -9826,13 +10022,13 @@
       </p:sp>
       <p:sp>
         <p:nvSpPr>
-          <p:cNvPr id="28" name="TextBox 27"/>
-          <p:cNvSpPr txBox="1"/>
-          <p:nvPr/>
-        </p:nvSpPr>
-        <p:spPr>
-          <a:xfrm>
-            <a:off x="2743200" y="4219956"/>
+          <p:cNvPr id="34" name="TextBox 33"/>
+          <p:cNvSpPr txBox="1"/>
+          <p:nvPr/>
+        </p:nvSpPr>
+        <p:spPr>
+          <a:xfrm>
+            <a:off x="7406640" y="4219956"/>
             <a:ext cx="1645920" cy="256032"/>
           </a:xfrm>
           <a:prstGeom prst="rect">
@@ -9856,210 +10052,14 @@
                 <a:ea typeface="맑은 고딕"/>
                 <a:cs typeface="맑은 고딕"/>
               </a:rPr>
-              <a:t>골절·화상</a:t>
+              <a:t>입원·일당</a:t>
             </a:r>
           </a:p>
         </p:txBody>
       </p:sp>
       <p:pic>
         <p:nvPicPr>
-          <p:cNvPr id="29" name="Picture 28" descr="g0_6502.png"/>
-          <p:cNvPicPr>
-            <a:picLocks noChangeAspect="1"/>
-          </p:cNvPicPr>
-          <p:nvPr/>
-        </p:nvPicPr>
-        <p:blipFill>
-          <a:blip r:embed="rId5"/>
-          <a:stretch>
-            <a:fillRect/>
-          </a:stretch>
-        </p:blipFill>
-        <p:spPr>
-          <a:xfrm>
-            <a:off x="5372099" y="3131820"/>
-            <a:ext cx="1051560" cy="1051560"/>
-          </a:xfrm>
-          <a:prstGeom prst="rect">
-            <a:avLst/>
-          </a:prstGeom>
-        </p:spPr>
-      </p:pic>
-      <p:sp>
-        <p:nvSpPr>
-          <p:cNvPr id="30" name="TextBox 29"/>
-          <p:cNvSpPr txBox="1"/>
-          <p:nvPr/>
-        </p:nvSpPr>
-        <p:spPr>
-          <a:xfrm>
-            <a:off x="5372099" y="3511296"/>
-            <a:ext cx="1051560" cy="292608"/>
-          </a:xfrm>
-          <a:prstGeom prst="rect">
-            <a:avLst/>
-          </a:prstGeom>
-          <a:noFill/>
-        </p:spPr>
-        <p:txBody>
-          <a:bodyPr wrap="none" anchor="t" lIns="45720" rIns="45720" tIns="22860" bIns="22860">
-            <a:spAutoFit/>
-          </a:bodyPr>
-          <a:lstStyle/>
-          <a:p>
-            <a:pPr algn="ctr"/>
-            <a:r>
-              <a:rPr sz="1300" b="1">
-                <a:solidFill>
-                  <a:srgbClr val="1A1A1A"/>
-                </a:solidFill>
-                <a:latin typeface="맑은 고딕"/>
-                <a:ea typeface="맑은 고딕"/>
-                <a:cs typeface="맑은 고딕"/>
-              </a:rPr>
-              <a:t>0%</a:t>
-            </a:r>
-          </a:p>
-        </p:txBody>
-      </p:sp>
-      <p:sp>
-        <p:nvSpPr>
-          <p:cNvPr id="31" name="TextBox 30"/>
-          <p:cNvSpPr txBox="1"/>
-          <p:nvPr/>
-        </p:nvSpPr>
-        <p:spPr>
-          <a:xfrm>
-            <a:off x="5074919" y="4219956"/>
-            <a:ext cx="1645920" cy="256032"/>
-          </a:xfrm>
-          <a:prstGeom prst="rect">
-            <a:avLst/>
-          </a:prstGeom>
-          <a:noFill/>
-        </p:spPr>
-        <p:txBody>
-          <a:bodyPr wrap="none" anchor="t" lIns="45720" rIns="45720" tIns="22860" bIns="22860">
-            <a:spAutoFit/>
-          </a:bodyPr>
-          <a:lstStyle/>
-          <a:p>
-            <a:pPr algn="ctr"/>
-            <a:r>
-              <a:rPr sz="900" b="1">
-                <a:solidFill>
-                  <a:srgbClr val="1A1A1A"/>
-                </a:solidFill>
-                <a:latin typeface="맑은 고딕"/>
-                <a:ea typeface="맑은 고딕"/>
-                <a:cs typeface="맑은 고딕"/>
-              </a:rPr>
-              <a:t>심장</a:t>
-            </a:r>
-          </a:p>
-        </p:txBody>
-      </p:sp>
-      <p:pic>
-        <p:nvPicPr>
-          <p:cNvPr id="32" name="Picture 31" descr="g67_3398.png"/>
-          <p:cNvPicPr>
-            <a:picLocks noChangeAspect="1"/>
-          </p:cNvPicPr>
-          <p:nvPr/>
-        </p:nvPicPr>
-        <p:blipFill>
-          <a:blip r:embed="rId7"/>
-          <a:stretch>
-            <a:fillRect/>
-          </a:stretch>
-        </p:blipFill>
-        <p:spPr>
-          <a:xfrm>
-            <a:off x="7703820" y="3131820"/>
-            <a:ext cx="1051560" cy="1051560"/>
-          </a:xfrm>
-          <a:prstGeom prst="rect">
-            <a:avLst/>
-          </a:prstGeom>
-        </p:spPr>
-      </p:pic>
-      <p:sp>
-        <p:nvSpPr>
-          <p:cNvPr id="33" name="TextBox 32"/>
-          <p:cNvSpPr txBox="1"/>
-          <p:nvPr/>
-        </p:nvSpPr>
-        <p:spPr>
-          <a:xfrm>
-            <a:off x="7703820" y="3511296"/>
-            <a:ext cx="1051560" cy="292608"/>
-          </a:xfrm>
-          <a:prstGeom prst="rect">
-            <a:avLst/>
-          </a:prstGeom>
-          <a:noFill/>
-        </p:spPr>
-        <p:txBody>
-          <a:bodyPr wrap="none" anchor="t" lIns="45720" rIns="45720" tIns="22860" bIns="22860">
-            <a:spAutoFit/>
-          </a:bodyPr>
-          <a:lstStyle/>
-          <a:p>
-            <a:pPr algn="ctr"/>
-            <a:r>
-              <a:rPr sz="1300" b="1">
-                <a:solidFill>
-                  <a:srgbClr val="1A1A1A"/>
-                </a:solidFill>
-                <a:latin typeface="맑은 고딕"/>
-                <a:ea typeface="맑은 고딕"/>
-                <a:cs typeface="맑은 고딕"/>
-              </a:rPr>
-              <a:t>67%</a:t>
-            </a:r>
-          </a:p>
-        </p:txBody>
-      </p:sp>
-      <p:sp>
-        <p:nvSpPr>
-          <p:cNvPr id="34" name="TextBox 33"/>
-          <p:cNvSpPr txBox="1"/>
-          <p:nvPr/>
-        </p:nvSpPr>
-        <p:spPr>
-          <a:xfrm>
-            <a:off x="7406640" y="4219956"/>
-            <a:ext cx="1645920" cy="256032"/>
-          </a:xfrm>
-          <a:prstGeom prst="rect">
-            <a:avLst/>
-          </a:prstGeom>
-          <a:noFill/>
-        </p:spPr>
-        <p:txBody>
-          <a:bodyPr wrap="none" anchor="t" lIns="45720" rIns="45720" tIns="22860" bIns="22860">
-            <a:spAutoFit/>
-          </a:bodyPr>
-          <a:lstStyle/>
-          <a:p>
-            <a:pPr algn="ctr"/>
-            <a:r>
-              <a:rPr sz="900" b="1">
-                <a:solidFill>
-                  <a:srgbClr val="1A1A1A"/>
-                </a:solidFill>
-                <a:latin typeface="맑은 고딕"/>
-                <a:ea typeface="맑은 고딕"/>
-                <a:cs typeface="맑은 고딕"/>
-              </a:rPr>
-              <a:t>입원·일당</a:t>
-            </a:r>
-          </a:p>
-        </p:txBody>
-      </p:sp>
-      <p:pic>
-        <p:nvPicPr>
-          <p:cNvPr id="35" name="Picture 34" descr="g50_7592.png"/>
+          <p:cNvPr id="35" name="Picture 34" descr="g50_5098.png"/>
           <p:cNvPicPr>
             <a:picLocks noChangeAspect="1"/>
           </p:cNvPicPr>
@@ -10665,7 +10665,7 @@
                 <a:ea typeface="맑은 고딕"/>
                 <a:cs typeface="맑은 고딕"/>
               </a:rPr>
-              <a:t>6,610만</a:t>
+              <a:t>6,510만</a:t>
             </a:r>
           </a:p>
         </p:txBody>
@@ -10827,7 +10827,7 @@
                 <a:ea typeface="맑은 고딕"/>
                 <a:cs typeface="맑은 고딕"/>
               </a:rPr>
-              <a:t>66%</a:t>
+              <a:t>65%</a:t>
             </a:r>
           </a:p>
         </p:txBody>
@@ -11313,7 +11313,7 @@
                 <a:ea typeface="맑은 고딕"/>
                 <a:cs typeface="맑은 고딕"/>
               </a:rPr>
-              <a:t>3개</a:t>
+              <a:t>1개</a:t>
             </a:r>
           </a:p>
         </p:txBody>
@@ -11469,13 +11469,13 @@
             <a:r>
               <a:rPr sz="800" b="0">
                 <a:solidFill>
-                  <a:srgbClr val="1D7A46"/>
-                </a:solidFill>
-                <a:latin typeface="맑은 고딕"/>
-                <a:ea typeface="맑은 고딕"/>
-                <a:cs typeface="맑은 고딕"/>
-              </a:rPr>
-              <a:t>100%</a:t>
+                  <a:srgbClr val="C0392B"/>
+                </a:solidFill>
+                <a:latin typeface="맑은 고딕"/>
+                <a:ea typeface="맑은 고딕"/>
+                <a:cs typeface="맑은 고딕"/>
+              </a:rPr>
+              <a:t>33%</a:t>
             </a:r>
           </a:p>
         </p:txBody>
@@ -13573,7 +13573,7 @@
                 <a:ea typeface="맑은 고딕"/>
                 <a:cs typeface="맑은 고딕"/>
               </a:rPr>
-              <a:t>2개</a:t>
+              <a:t>3개</a:t>
             </a:r>
           </a:p>
         </p:txBody>
@@ -13729,13 +13729,13 @@
             <a:r>
               <a:rPr sz="800" b="0">
                 <a:solidFill>
-                  <a:srgbClr val="C9A227"/>
-                </a:solidFill>
-                <a:latin typeface="맑은 고딕"/>
-                <a:ea typeface="맑은 고딕"/>
-                <a:cs typeface="맑은 고딕"/>
-              </a:rPr>
-              <a:t>67%</a:t>
+                  <a:srgbClr val="1D7A46"/>
+                </a:solidFill>
+                <a:latin typeface="맑은 고딕"/>
+                <a:ea typeface="맑은 고딕"/>
+                <a:cs typeface="맑은 고딕"/>
+              </a:rPr>
+              <a:t>100%</a:t>
             </a:r>
           </a:p>
         </p:txBody>
@@ -22700,7 +22700,7 @@
                 <a:ea typeface="맑은 고딕"/>
                 <a:cs typeface="맑은 고딕"/>
               </a:rPr>
-              <a:t>2,200만</a:t>
+              <a:t>2,100만</a:t>
             </a:r>
           </a:p>
         </p:txBody>

--- a/보장설명서_김규훈님_편집가능.pptx
+++ b/보장설명서_김규훈님_편집가능.pptx
@@ -5953,7 +5953,7 @@
                 <a:ea typeface="맑은 고딕"/>
                 <a:cs typeface="맑은 고딕"/>
               </a:rPr>
-              <a:t>대물 500만</a:t>
+              <a:t>대물 500만   6주미만 1,000만   자부상 30만</a:t>
             </a:r>
           </a:p>
         </p:txBody>
@@ -6113,7 +6113,7 @@
                 <a:ea typeface="맑은 고딕"/>
                 <a:cs typeface="맑은 고딕"/>
               </a:rPr>
-              <a:t>상해중환자실 5만   간호통합병동 5만</a:t>
+              <a:t>간병인 15만   간호통합병동 7만   상해중환자실 5만</a:t>
             </a:r>
           </a:p>
         </p:txBody>
@@ -9177,7 +9177,7 @@
       </p:sp>
       <p:pic>
         <p:nvPicPr>
-          <p:cNvPr id="8" name="Picture 7" descr="g65_523.png"/>
+          <p:cNvPr id="8" name="Picture 7" descr="g65_7441.png"/>
           <p:cNvPicPr>
             <a:picLocks noChangeAspect="1"/>
           </p:cNvPicPr>
@@ -9275,7 +9275,7 @@
       </p:sp>
       <p:pic>
         <p:nvPicPr>
-          <p:cNvPr id="11" name="Picture 10" descr="g100_4464.png"/>
+          <p:cNvPr id="11" name="Picture 10" descr="g100_8227.png"/>
           <p:cNvPicPr>
             <a:picLocks noChangeAspect="1"/>
           </p:cNvPicPr>
@@ -9373,7 +9373,7 @@
       </p:sp>
       <p:pic>
         <p:nvPicPr>
-          <p:cNvPr id="14" name="Picture 13" descr="g33_3356.png"/>
+          <p:cNvPr id="14" name="Picture 13" descr="g33_528.png"/>
           <p:cNvPicPr>
             <a:picLocks noChangeAspect="1"/>
           </p:cNvPicPr>
@@ -9471,7 +9471,7 @@
       </p:sp>
       <p:pic>
         <p:nvPicPr>
-          <p:cNvPr id="17" name="Picture 16" descr="g25_2625.png"/>
+          <p:cNvPr id="17" name="Picture 16" descr="g25_5127.png"/>
           <p:cNvPicPr>
             <a:picLocks noChangeAspect="1"/>
           </p:cNvPicPr>
@@ -9569,7 +9569,7 @@
       </p:sp>
       <p:pic>
         <p:nvPicPr>
-          <p:cNvPr id="20" name="Picture 19" descr="g0_4121.png"/>
+          <p:cNvPr id="20" name="Picture 19" descr="g0_7365.png"/>
           <p:cNvPicPr>
             <a:picLocks noChangeAspect="1"/>
           </p:cNvPicPr>
@@ -9667,7 +9667,7 @@
       </p:sp>
       <p:pic>
         <p:nvPicPr>
-          <p:cNvPr id="23" name="Picture 22" descr="g34_61.png"/>
+          <p:cNvPr id="23" name="Picture 22" descr="g34_468.png"/>
           <p:cNvPicPr>
             <a:picLocks noChangeAspect="1"/>
           </p:cNvPicPr>
@@ -9765,7 +9765,7 @@
       </p:sp>
       <p:pic>
         <p:nvPicPr>
-          <p:cNvPr id="26" name="Picture 25" descr="g100_4464.png"/>
+          <p:cNvPr id="26" name="Picture 25" descr="g100_8227.png"/>
           <p:cNvPicPr>
             <a:picLocks noChangeAspect="1"/>
           </p:cNvPicPr>
@@ -9863,7 +9863,7 @@
       </p:sp>
       <p:pic>
         <p:nvPicPr>
-          <p:cNvPr id="29" name="Picture 28" descr="g0_4121.png"/>
+          <p:cNvPr id="29" name="Picture 28" descr="g0_7365.png"/>
           <p:cNvPicPr>
             <a:picLocks noChangeAspect="1"/>
           </p:cNvPicPr>
@@ -9961,7 +9961,7 @@
       </p:sp>
       <p:pic>
         <p:nvPicPr>
-          <p:cNvPr id="32" name="Picture 31" descr="g100_4464.png"/>
+          <p:cNvPr id="32" name="Picture 31" descr="g100_8227.png"/>
           <p:cNvPicPr>
             <a:picLocks noChangeAspect="1"/>
           </p:cNvPicPr>
@@ -10059,7 +10059,7 @@
       </p:sp>
       <p:pic>
         <p:nvPicPr>
-          <p:cNvPr id="35" name="Picture 34" descr="g50_5098.png"/>
+          <p:cNvPr id="35" name="Picture 34" descr="g50_7950.png"/>
           <p:cNvPicPr>
             <a:picLocks noChangeAspect="1"/>
           </p:cNvPicPr>
@@ -22603,7 +22603,7 @@
         <p:spPr>
           <a:xfrm>
             <a:off x="594360" y="1737360"/>
-            <a:ext cx="3657600" cy="292608"/>
+            <a:ext cx="3200400" cy="292608"/>
           </a:xfrm>
           <a:prstGeom prst="rect">
             <a:avLst/>
@@ -22640,7 +22640,7 @@
         <p:spPr>
           <a:xfrm>
             <a:off x="594360" y="2048256"/>
-            <a:ext cx="3657600" cy="548640"/>
+            <a:ext cx="3200400" cy="548640"/>
           </a:xfrm>
           <a:prstGeom prst="rect">
             <a:avLst/>
@@ -22676,8 +22676,8 @@
         </p:nvSpPr>
         <p:spPr>
           <a:xfrm>
-            <a:off x="4023360" y="1664208"/>
-            <a:ext cx="1737360" cy="1051560"/>
+            <a:off x="3703320" y="1664208"/>
+            <a:ext cx="2057400" cy="1051560"/>
           </a:xfrm>
           <a:prstGeom prst="rect">
             <a:avLst/>
@@ -22758,7 +22758,7 @@
         <p:spPr>
           <a:xfrm>
             <a:off x="594360" y="2926080"/>
-            <a:ext cx="3657600" cy="292608"/>
+            <a:ext cx="3200400" cy="292608"/>
           </a:xfrm>
           <a:prstGeom prst="rect">
             <a:avLst/>
@@ -22795,7 +22795,7 @@
         <p:spPr>
           <a:xfrm>
             <a:off x="594360" y="3236976"/>
-            <a:ext cx="3657600" cy="548640"/>
+            <a:ext cx="3200400" cy="548640"/>
           </a:xfrm>
           <a:prstGeom prst="rect">
             <a:avLst/>
@@ -22831,8 +22831,8 @@
         </p:nvSpPr>
         <p:spPr>
           <a:xfrm>
-            <a:off x="4023360" y="2852928"/>
-            <a:ext cx="1737360" cy="1051560"/>
+            <a:off x="3703320" y="2852928"/>
+            <a:ext cx="2057400" cy="1051560"/>
           </a:xfrm>
           <a:prstGeom prst="rect">
             <a:avLst/>
@@ -22913,7 +22913,7 @@
         <p:spPr>
           <a:xfrm>
             <a:off x="594360" y="4114800"/>
-            <a:ext cx="3657600" cy="292608"/>
+            <a:ext cx="3200400" cy="292608"/>
           </a:xfrm>
           <a:prstGeom prst="rect">
             <a:avLst/>
@@ -22950,7 +22950,7 @@
         <p:spPr>
           <a:xfrm>
             <a:off x="594360" y="4425696"/>
-            <a:ext cx="3657600" cy="548640"/>
+            <a:ext cx="3200400" cy="548640"/>
           </a:xfrm>
           <a:prstGeom prst="rect">
             <a:avLst/>
@@ -22986,8 +22986,8 @@
         </p:nvSpPr>
         <p:spPr>
           <a:xfrm>
-            <a:off x="4023360" y="4041648"/>
-            <a:ext cx="1737360" cy="1051560"/>
+            <a:off x="3703320" y="4041648"/>
+            <a:ext cx="2057400" cy="1051560"/>
           </a:xfrm>
           <a:prstGeom prst="rect">
             <a:avLst/>
@@ -23068,7 +23068,7 @@
         <p:spPr>
           <a:xfrm>
             <a:off x="6537960" y="1737360"/>
-            <a:ext cx="3657600" cy="292608"/>
+            <a:ext cx="3200400" cy="292608"/>
           </a:xfrm>
           <a:prstGeom prst="rect">
             <a:avLst/>
@@ -23105,7 +23105,7 @@
         <p:spPr>
           <a:xfrm>
             <a:off x="6537960" y="2048256"/>
-            <a:ext cx="3657600" cy="548640"/>
+            <a:ext cx="3200400" cy="548640"/>
           </a:xfrm>
           <a:prstGeom prst="rect">
             <a:avLst/>
@@ -23141,8 +23141,8 @@
         </p:nvSpPr>
         <p:spPr>
           <a:xfrm>
-            <a:off x="9966960" y="1664208"/>
-            <a:ext cx="1737360" cy="1051560"/>
+            <a:off x="9646920" y="1664208"/>
+            <a:ext cx="2057400" cy="1051560"/>
           </a:xfrm>
           <a:prstGeom prst="rect">
             <a:avLst/>
@@ -23223,7 +23223,7 @@
         <p:spPr>
           <a:xfrm>
             <a:off x="6537960" y="2926080"/>
-            <a:ext cx="3657600" cy="292608"/>
+            <a:ext cx="3200400" cy="292608"/>
           </a:xfrm>
           <a:prstGeom prst="rect">
             <a:avLst/>
@@ -23260,7 +23260,7 @@
         <p:spPr>
           <a:xfrm>
             <a:off x="6537960" y="3236976"/>
-            <a:ext cx="3657600" cy="548640"/>
+            <a:ext cx="3200400" cy="548640"/>
           </a:xfrm>
           <a:prstGeom prst="rect">
             <a:avLst/>
@@ -23296,8 +23296,8 @@
         </p:nvSpPr>
         <p:spPr>
           <a:xfrm>
-            <a:off x="9966960" y="2852928"/>
-            <a:ext cx="1737360" cy="1051560"/>
+            <a:off x="9646920" y="2852928"/>
+            <a:ext cx="2057400" cy="1051560"/>
           </a:xfrm>
           <a:prstGeom prst="rect">
             <a:avLst/>
@@ -23378,7 +23378,7 @@
         <p:spPr>
           <a:xfrm>
             <a:off x="6537960" y="4114800"/>
-            <a:ext cx="3657600" cy="292608"/>
+            <a:ext cx="3200400" cy="292608"/>
           </a:xfrm>
           <a:prstGeom prst="rect">
             <a:avLst/>
@@ -23415,7 +23415,7 @@
         <p:spPr>
           <a:xfrm>
             <a:off x="6537960" y="4425696"/>
-            <a:ext cx="3657600" cy="548640"/>
+            <a:ext cx="3200400" cy="548640"/>
           </a:xfrm>
           <a:prstGeom prst="rect">
             <a:avLst/>
@@ -23451,8 +23451,8 @@
         </p:nvSpPr>
         <p:spPr>
           <a:xfrm>
-            <a:off x="9966960" y="4041648"/>
-            <a:ext cx="1737360" cy="1051560"/>
+            <a:off x="9646920" y="4041648"/>
+            <a:ext cx="2057400" cy="1051560"/>
           </a:xfrm>
           <a:prstGeom prst="rect">
             <a:avLst/>
